--- a/design-system/samples/legacy-overview_editorial_auto.pptx
+++ b/design-system/samples/legacy-overview_editorial_auto.pptx
@@ -4491,7 +4491,7 @@
         <p:spPr>
           <a:xfrm>
             <a:off x="877824" y="841248"/>
-            <a:ext cx="10058400" cy="320040"/>
+            <a:ext cx="5486400" cy="320040"/>
           </a:xfrm>
           <a:prstGeom prst="rect">
             <a:avLst/>
@@ -4534,7 +4534,7 @@
         <p:spPr>
           <a:xfrm>
             <a:off x="841248" y="1225296"/>
-            <a:ext cx="10424160" cy="1097280"/>
+            <a:ext cx="5394960" cy="1188720"/>
           </a:xfrm>
           <a:prstGeom prst="rect">
             <a:avLst/>
@@ -4557,7 +4557,7 @@
               </a:spcAft>
             </a:pPr>
             <a:r>
-              <a:rPr sz="3400" b="1" i="0" lang="en-AU" spc="-74">
+              <a:rPr sz="3000" b="1" i="0" lang="en-AU" spc="-65">
                 <a:solidFill>
                   <a:srgbClr val="FFFFFF"/>
                 </a:solidFill>
@@ -4566,7 +4566,7 @@
               <a:t>About </a:t>
             </a:r>
             <a:r>
-              <a:rPr sz="3400" b="1" i="0" lang="en-AU" spc="-74">
+              <a:rPr sz="3000" b="1" i="0" lang="en-AU" spc="-65">
                 <a:solidFill>
                   <a:srgbClr val="EA493F"/>
                 </a:solidFill>
@@ -4586,7 +4586,7 @@
         <p:spPr>
           <a:xfrm>
             <a:off x="877824" y="2514600"/>
-            <a:ext cx="10436047" cy="3977639"/>
+            <a:ext cx="5029200" cy="3931920"/>
           </a:xfrm>
           <a:prstGeom prst="rect">
             <a:avLst/>
@@ -4609,7 +4609,7 @@
               </a:spcAft>
             </a:pPr>
             <a:r>
-              <a:rPr sz="1600" b="1" i="0" lang="en-AU" spc="0">
+              <a:rPr sz="1400" b="1" i="0" lang="en-AU" spc="0">
                 <a:solidFill>
                   <a:srgbClr val="EA493F"/>
                 </a:solidFill>
@@ -4618,7 +4618,7 @@
               <a:t>—  </a:t>
             </a:r>
             <a:r>
-              <a:rPr sz="1600" b="0" i="0" lang="en-AU" spc="0">
+              <a:rPr sz="1400" b="0" i="0" lang="en-AU" spc="0">
                 <a:solidFill>
                   <a:srgbClr val="D6D6D6"/>
                 </a:solidFill>
@@ -4633,14 +4633,14 @@
                 <a:spcPct val="122000"/>
               </a:lnSpc>
               <a:spcBef>
-                <a:spcPts val="900"/>
+                <a:spcPts val="700"/>
               </a:spcBef>
               <a:spcAft>
                 <a:spcPts val="0"/>
               </a:spcAft>
             </a:pPr>
             <a:r>
-              <a:rPr sz="1600" b="1" i="0" lang="en-AU" spc="0">
+              <a:rPr sz="1400" b="1" i="0" lang="en-AU" spc="0">
                 <a:solidFill>
                   <a:srgbClr val="EA493F"/>
                 </a:solidFill>
@@ -4649,7 +4649,7 @@
               <a:t>—  </a:t>
             </a:r>
             <a:r>
-              <a:rPr sz="1600" b="0" i="0" lang="en-AU" spc="0">
+              <a:rPr sz="1400" b="0" i="0" lang="en-AU" spc="0">
                 <a:solidFill>
                   <a:srgbClr val="D6D6D6"/>
                 </a:solidFill>
@@ -4664,14 +4664,14 @@
                 <a:spcPct val="122000"/>
               </a:lnSpc>
               <a:spcBef>
-                <a:spcPts val="900"/>
+                <a:spcPts val="700"/>
               </a:spcBef>
               <a:spcAft>
                 <a:spcPts val="0"/>
               </a:spcAft>
             </a:pPr>
             <a:r>
-              <a:rPr sz="1600" b="1" i="0" lang="en-AU" spc="0">
+              <a:rPr sz="1400" b="1" i="0" lang="en-AU" spc="0">
                 <a:solidFill>
                   <a:srgbClr val="EA493F"/>
                 </a:solidFill>
@@ -4680,7 +4680,7 @@
               <a:t>—  </a:t>
             </a:r>
             <a:r>
-              <a:rPr sz="1600" b="0" i="0" lang="en-AU" spc="0">
+              <a:rPr sz="1400" b="0" i="0" lang="en-AU" spc="0">
                 <a:solidFill>
                   <a:srgbClr val="D6D6D6"/>
                 </a:solidFill>
@@ -4695,14 +4695,14 @@
                 <a:spcPct val="122000"/>
               </a:lnSpc>
               <a:spcBef>
-                <a:spcPts val="900"/>
+                <a:spcPts val="700"/>
               </a:spcBef>
               <a:spcAft>
                 <a:spcPts val="0"/>
               </a:spcAft>
             </a:pPr>
             <a:r>
-              <a:rPr sz="1600" b="1" i="0" lang="en-AU" spc="0">
+              <a:rPr sz="1400" b="1" i="0" lang="en-AU" spc="0">
                 <a:solidFill>
                   <a:srgbClr val="EA493F"/>
                 </a:solidFill>
@@ -4711,7 +4711,7 @@
               <a:t>—  </a:t>
             </a:r>
             <a:r>
-              <a:rPr sz="1600" b="0" i="0" lang="en-AU" spc="0">
+              <a:rPr sz="1400" b="0" i="0" lang="en-AU" spc="0">
                 <a:solidFill>
                   <a:srgbClr val="D6D6D6"/>
                 </a:solidFill>
@@ -4726,14 +4726,14 @@
                 <a:spcPct val="122000"/>
               </a:lnSpc>
               <a:spcBef>
-                <a:spcPts val="900"/>
+                <a:spcPts val="700"/>
               </a:spcBef>
               <a:spcAft>
                 <a:spcPts val="0"/>
               </a:spcAft>
             </a:pPr>
             <a:r>
-              <a:rPr sz="1600" b="1" i="0" lang="en-AU" spc="0">
+              <a:rPr sz="1400" b="1" i="0" lang="en-AU" spc="0">
                 <a:solidFill>
                   <a:srgbClr val="EA493F"/>
                 </a:solidFill>
@@ -4742,7 +4742,7 @@
               <a:t>—  </a:t>
             </a:r>
             <a:r>
-              <a:rPr sz="1600" b="0" i="0" lang="en-AU" spc="0">
+              <a:rPr sz="1400" b="0" i="0" lang="en-AU" spc="0">
                 <a:solidFill>
                   <a:srgbClr val="D6D6D6"/>
                 </a:solidFill>
@@ -4753,6 +4753,30 @@
           </a:p>
         </p:txBody>
       </p:sp>
+      <p:pic>
+        <p:nvPicPr>
+          <p:cNvPr id="7" name="Picture 6" descr="_xlate_1.png"/>
+          <p:cNvPicPr>
+            <a:picLocks noChangeAspect="1"/>
+          </p:cNvPicPr>
+          <p:nvPr/>
+        </p:nvPicPr>
+        <p:blipFill>
+          <a:blip r:embed="rId3"/>
+          <a:stretch>
+            <a:fillRect/>
+          </a:stretch>
+        </p:blipFill>
+        <p:spPr>
+          <a:xfrm>
+            <a:off x="6355080" y="1918563"/>
+            <a:ext cx="4956048" cy="3386633"/>
+          </a:xfrm>
+          <a:prstGeom prst="rect">
+            <a:avLst/>
+          </a:prstGeom>
+        </p:spPr>
+      </p:pic>
     </p:spTree>
   </p:cSld>
   <p:clrMapOvr>
@@ -6614,7 +6638,7 @@
         <p:spPr>
           <a:xfrm>
             <a:off x="877824" y="841248"/>
-            <a:ext cx="10058400" cy="320040"/>
+            <a:ext cx="9144000" cy="320040"/>
           </a:xfrm>
           <a:prstGeom prst="rect">
             <a:avLst/>
@@ -6650,14 +6674,101 @@
       </p:sp>
       <p:sp>
         <p:nvSpPr>
-          <p:cNvPr id="5" name="TextBox 4"/>
+          <p:cNvPr id="5" name="Rectangle 4"/>
+          <p:cNvSpPr/>
+          <p:nvPr/>
+        </p:nvSpPr>
+        <p:spPr>
+          <a:xfrm>
+            <a:off x="877824" y="1554480"/>
+            <a:ext cx="64008" cy="2926080"/>
+          </a:xfrm>
+          <a:prstGeom prst="rect">
+            <a:avLst/>
+          </a:prstGeom>
+          <a:solidFill>
+            <a:srgbClr val="EA493F"/>
+          </a:solidFill>
+          <a:ln>
+            <a:noFill/>
+          </a:ln>
+          <a:effectLst/>
+        </p:spPr>
+        <p:style>
+          <a:lnRef idx="1">
+            <a:schemeClr val="accent1"/>
+          </a:lnRef>
+          <a:fillRef idx="3">
+            <a:schemeClr val="accent1"/>
+          </a:fillRef>
+          <a:effectRef idx="2">
+            <a:schemeClr val="accent1"/>
+          </a:effectRef>
+          <a:fontRef idx="minor">
+            <a:schemeClr val="lt1"/>
+          </a:fontRef>
+        </p:style>
+        <p:txBody>
+          <a:bodyPr rtlCol="0" anchor="ctr"/>
+          <a:lstStyle/>
+          <a:p>
+            <a:pPr algn="ctr"/>
+          </a:p>
+        </p:txBody>
+      </p:sp>
+      <p:sp>
+        <p:nvSpPr>
+          <p:cNvPr id="6" name="TextBox 5"/>
           <p:cNvSpPr txBox="1"/>
           <p:nvPr/>
         </p:nvSpPr>
         <p:spPr>
           <a:xfrm>
-            <a:off x="841248" y="1225296"/>
-            <a:ext cx="10424160" cy="1097280"/>
+            <a:off x="1207008" y="1463040"/>
+            <a:ext cx="9875520" cy="3474720"/>
+          </a:xfrm>
+          <a:prstGeom prst="rect">
+            <a:avLst/>
+          </a:prstGeom>
+          <a:noFill/>
+        </p:spPr>
+        <p:txBody>
+          <a:bodyPr wrap="square" anchor="t" lIns="0" rIns="0" tIns="0" bIns="0"/>
+          <a:lstStyle/>
+          <a:p>
+            <a:pPr algn="l">
+              <a:lnSpc>
+                <a:spcPct val="110000"/>
+              </a:lnSpc>
+              <a:spcBef>
+                <a:spcPts val="0"/>
+              </a:spcBef>
+              <a:spcAft>
+                <a:spcPts val="0"/>
+              </a:spcAft>
+            </a:pPr>
+            <a:r>
+              <a:rPr sz="3600" b="1" i="0" lang="en-AU" spc="-72">
+                <a:solidFill>
+                  <a:srgbClr val="EA493F"/>
+                </a:solidFill>
+                <a:latin typeface="Inter"/>
+              </a:rPr>
+              <a:t>“They delivered in weeks what we’d scoped for a year — and our team actually uses it.”</a:t>
+            </a:r>
+          </a:p>
+        </p:txBody>
+      </p:sp>
+      <p:sp>
+        <p:nvSpPr>
+          <p:cNvPr id="7" name="TextBox 6"/>
+          <p:cNvSpPr txBox="1"/>
+          <p:nvPr/>
+        </p:nvSpPr>
+        <p:spPr>
+          <a:xfrm>
+            <a:off x="1207008" y="5029200"/>
+            <a:ext cx="9144000" cy="457200"/>
           </a:xfrm>
           <a:prstGeom prst="rect">
             <a:avLst/>
@@ -6680,101 +6791,9 @@
               </a:spcAft>
             </a:pPr>
             <a:r>
-              <a:rPr sz="3400" b="1" i="0" lang="en-AU" spc="-74">
-                <a:solidFill>
-                  <a:srgbClr val="111111"/>
-                </a:solidFill>
-                <a:latin typeface="Inter"/>
-              </a:rPr>
-              <a:t>What Clients </a:t>
-            </a:r>
-            <a:r>
-              <a:rPr sz="3400" b="1" i="0" lang="en-AU" spc="-74">
-                <a:solidFill>
-                  <a:srgbClr val="EA493F"/>
-                </a:solidFill>
-                <a:latin typeface="Inter"/>
-              </a:rPr>
-              <a:t>Say</a:t>
-            </a:r>
-          </a:p>
-        </p:txBody>
-      </p:sp>
-      <p:sp>
-        <p:nvSpPr>
-          <p:cNvPr id="6" name="TextBox 5"/>
-          <p:cNvSpPr txBox="1"/>
-          <p:nvPr/>
-        </p:nvSpPr>
-        <p:spPr>
-          <a:xfrm>
-            <a:off x="877824" y="2514600"/>
-            <a:ext cx="10436047" cy="3977639"/>
-          </a:xfrm>
-          <a:prstGeom prst="rect">
-            <a:avLst/>
-          </a:prstGeom>
-          <a:noFill/>
-        </p:spPr>
-        <p:txBody>
-          <a:bodyPr wrap="square" anchor="t" lIns="0" rIns="0" tIns="0" bIns="0"/>
-          <a:lstStyle/>
-          <a:p>
-            <a:pPr algn="l">
-              <a:lnSpc>
-                <a:spcPct val="122000"/>
-              </a:lnSpc>
-              <a:spcBef>
-                <a:spcPts val="0"/>
-              </a:spcBef>
-              <a:spcAft>
-                <a:spcPts val="0"/>
-              </a:spcAft>
-            </a:pPr>
-            <a:r>
-              <a:rPr sz="1600" b="1" i="0" lang="en-AU" spc="0">
-                <a:solidFill>
-                  <a:srgbClr val="EA493F"/>
-                </a:solidFill>
-                <a:latin typeface="Inter"/>
-              </a:rPr>
-              <a:t>—  </a:t>
-            </a:r>
-            <a:r>
-              <a:rPr sz="1600" b="0" i="0" lang="en-AU" spc="0">
-                <a:solidFill>
-                  <a:srgbClr val="323232"/>
-                </a:solidFill>
-                <a:latin typeface="Inter"/>
-              </a:rPr>
-              <a:t>“They delivered in weeks what we’d scoped for a year — and our team actually uses it.”</a:t>
-            </a:r>
-          </a:p>
-          <a:p>
-            <a:pPr algn="l">
-              <a:lnSpc>
-                <a:spcPct val="122000"/>
-              </a:lnSpc>
-              <a:spcBef>
-                <a:spcPts val="900"/>
-              </a:spcBef>
-              <a:spcAft>
-                <a:spcPts val="0"/>
-              </a:spcAft>
-            </a:pPr>
-            <a:r>
-              <a:rPr sz="1600" b="1" i="0" lang="en-AU" spc="0">
-                <a:solidFill>
-                  <a:srgbClr val="EA493F"/>
-                </a:solidFill>
-                <a:latin typeface="Inter"/>
-              </a:rPr>
-              <a:t>—  </a:t>
-            </a:r>
-            <a:r>
-              <a:rPr sz="1600" b="0" i="0" lang="en-AU" spc="0">
-                <a:solidFill>
-                  <a:srgbClr val="323232"/>
+              <a:rPr sz="1200" b="1" i="0" lang="en-AU" spc="24">
+                <a:solidFill>
+                  <a:srgbClr val="AEAEAE"/>
                 </a:solidFill>
                 <a:latin typeface="Inter"/>
               </a:rPr>
